--- a/materials/react-intro-slides/React-入门教学.pptx
+++ b/materials/react-intro-slides/React-入门教学.pptx
@@ -4612,7 +4612,7 @@
               </a:spcAft>
             </a:pPr>
             <a:r>
-              <a:rPr sz="1100" b="0">
+              <a:rPr sz="1200" b="0">
                 <a:solidFill>
                   <a:srgbClr val="8A8A8A"/>
                 </a:solidFill>
@@ -4656,7 +4656,7 @@
               </a:spcAft>
             </a:pPr>
             <a:r>
-              <a:rPr sz="1100" b="0">
+              <a:rPr sz="1200" b="0">
                 <a:solidFill>
                   <a:srgbClr val="8A8A8A"/>
                 </a:solidFill>
@@ -4967,7 +4967,7 @@
               </a:spcAft>
             </a:pPr>
             <a:r>
-              <a:rPr sz="1100" b="0">
+              <a:rPr sz="1200" b="0">
                 <a:solidFill>
                   <a:srgbClr val="8A8A8A"/>
                 </a:solidFill>
@@ -5011,7 +5011,7 @@
               </a:spcAft>
             </a:pPr>
             <a:r>
-              <a:rPr sz="1100" b="0">
+              <a:rPr sz="1200" b="0">
                 <a:solidFill>
                   <a:srgbClr val="8A8A8A"/>
                 </a:solidFill>
@@ -5424,7 +5424,7 @@
               </a:spcAft>
             </a:pPr>
             <a:r>
-              <a:rPr sz="1100" b="0">
+              <a:rPr sz="1200" b="0">
                 <a:solidFill>
                   <a:srgbClr val="8A8A8A"/>
                 </a:solidFill>
@@ -5468,7 +5468,7 @@
               </a:spcAft>
             </a:pPr>
             <a:r>
-              <a:rPr sz="1100" b="0">
+              <a:rPr sz="1200" b="0">
                 <a:solidFill>
                   <a:srgbClr val="8A8A8A"/>
                 </a:solidFill>
@@ -5881,7 +5881,7 @@
               </a:spcAft>
             </a:pPr>
             <a:r>
-              <a:rPr sz="1100" b="0">
+              <a:rPr sz="1200" b="0">
                 <a:solidFill>
                   <a:srgbClr val="8A8A8A"/>
                 </a:solidFill>
@@ -5925,7 +5925,7 @@
               </a:spcAft>
             </a:pPr>
             <a:r>
-              <a:rPr sz="1100" b="0">
+              <a:rPr sz="1200" b="0">
                 <a:solidFill>
                   <a:srgbClr val="8A8A8A"/>
                 </a:solidFill>
@@ -6317,7 +6317,7 @@
               </a:spcAft>
             </a:pPr>
             <a:r>
-              <a:rPr sz="1100" b="0">
+              <a:rPr sz="1200" b="0">
                 <a:solidFill>
                   <a:srgbClr val="8A8A8A"/>
                 </a:solidFill>
@@ -6361,7 +6361,7 @@
               </a:spcAft>
             </a:pPr>
             <a:r>
-              <a:rPr sz="1100" b="0">
+              <a:rPr sz="1200" b="0">
                 <a:solidFill>
                   <a:srgbClr val="8A8A8A"/>
                 </a:solidFill>
@@ -6885,7 +6885,7 @@
               </a:spcAft>
             </a:pPr>
             <a:r>
-              <a:rPr sz="1100" b="0">
+              <a:rPr sz="1200" b="0">
                 <a:solidFill>
                   <a:srgbClr val="8A8A8A"/>
                 </a:solidFill>
@@ -6929,7 +6929,7 @@
               </a:spcAft>
             </a:pPr>
             <a:r>
-              <a:rPr sz="1100" b="0">
+              <a:rPr sz="1200" b="0">
                 <a:solidFill>
                   <a:srgbClr val="8A8A8A"/>
                 </a:solidFill>
@@ -7321,7 +7321,7 @@
               </a:spcAft>
             </a:pPr>
             <a:r>
-              <a:rPr sz="1100" b="0">
+              <a:rPr sz="1200" b="0">
                 <a:solidFill>
                   <a:srgbClr val="8A8A8A"/>
                 </a:solidFill>
@@ -7365,7 +7365,7 @@
               </a:spcAft>
             </a:pPr>
             <a:r>
-              <a:rPr sz="1100" b="0">
+              <a:rPr sz="1200" b="0">
                 <a:solidFill>
                   <a:srgbClr val="8A8A8A"/>
                 </a:solidFill>
@@ -7417,7 +7417,7 @@
                 <a:ea typeface="微软雅黑"/>
                 <a:cs typeface="微软雅黑"/>
               </a:rPr>
-              <a:t>把界面拆成组件层级，小组件放到大组件里</a:t>
+              <a:t>1. 把界面拆成组件层级，小组件放到大组件里</a:t>
             </a:r>
           </a:p>
           <a:p>
@@ -7438,7 +7438,7 @@
                 <a:ea typeface="微软雅黑"/>
                 <a:cs typeface="微软雅黑"/>
               </a:rPr>
-              <a:t>先写静态版本：只摆结构，不写交互</a:t>
+              <a:t>2. 先写静态版本：只摆结构，不写交互</a:t>
             </a:r>
           </a:p>
           <a:p>
@@ -7459,7 +7459,7 @@
                 <a:ea typeface="微软雅黑"/>
                 <a:cs typeface="微软雅黑"/>
               </a:rPr>
-              <a:t>找出最小且完整的 state 集合</a:t>
+              <a:t>3. 找出最小且完整的 state 集合</a:t>
             </a:r>
           </a:p>
           <a:p>
@@ -7480,7 +7480,7 @@
                 <a:ea typeface="微软雅黑"/>
                 <a:cs typeface="微软雅黑"/>
               </a:rPr>
-              <a:t>判断这份 state 该放在哪个组件里</a:t>
+              <a:t>4. 判断这份 state 该放在哪个组件里</a:t>
             </a:r>
           </a:p>
           <a:p>
@@ -7501,7 +7501,7 @@
                 <a:ea typeface="微软雅黑"/>
                 <a:cs typeface="微软雅黑"/>
               </a:rPr>
-              <a:t>加反向数据流：子组件触发父组件的 state 变化</a:t>
+              <a:t>5. 加反向数据流：子组件触发父组件的 state 变化</a:t>
             </a:r>
           </a:p>
         </p:txBody>
@@ -7695,7 +7695,7 @@
               </a:spcAft>
             </a:pPr>
             <a:r>
-              <a:rPr sz="1100" b="0">
+              <a:rPr sz="1200" b="0">
                 <a:solidFill>
                   <a:srgbClr val="8A8A8A"/>
                 </a:solidFill>
@@ -7739,7 +7739,7 @@
               </a:spcAft>
             </a:pPr>
             <a:r>
-              <a:rPr sz="1100" b="0">
+              <a:rPr sz="1200" b="0">
                 <a:solidFill>
                   <a:srgbClr val="8A8A8A"/>
                 </a:solidFill>
@@ -8068,7 +8068,7 @@
               </a:spcAft>
             </a:pPr>
             <a:r>
-              <a:rPr sz="1100" b="0">
+              <a:rPr sz="1200" b="0">
                 <a:solidFill>
                   <a:srgbClr val="8A8A8A"/>
                 </a:solidFill>
@@ -8112,7 +8112,7 @@
               </a:spcAft>
             </a:pPr>
             <a:r>
-              <a:rPr sz="1100" b="0">
+              <a:rPr sz="1200" b="0">
                 <a:solidFill>
                   <a:srgbClr val="8A8A8A"/>
                 </a:solidFill>
@@ -8398,7 +8398,7 @@
               </a:spcAft>
             </a:pPr>
             <a:r>
-              <a:rPr sz="1100" b="0">
+              <a:rPr sz="1200" b="0">
                 <a:solidFill>
                   <a:srgbClr val="8A8A8A"/>
                 </a:solidFill>
@@ -8442,7 +8442,7 @@
               </a:spcAft>
             </a:pPr>
             <a:r>
-              <a:rPr sz="1100" b="0">
+              <a:rPr sz="1200" b="0">
                 <a:solidFill>
                   <a:srgbClr val="8A8A8A"/>
                 </a:solidFill>
@@ -8897,7 +8897,7 @@
               </a:spcAft>
             </a:pPr>
             <a:r>
-              <a:rPr sz="1100" b="0">
+              <a:rPr sz="1200" b="0">
                 <a:solidFill>
                   <a:srgbClr val="8A8A8A"/>
                 </a:solidFill>
@@ -8941,7 +8941,7 @@
               </a:spcAft>
             </a:pPr>
             <a:r>
-              <a:rPr sz="1100" b="0">
+              <a:rPr sz="1200" b="0">
                 <a:solidFill>
                   <a:srgbClr val="8A8A8A"/>
                 </a:solidFill>
@@ -9250,7 +9250,7 @@
               </a:spcAft>
             </a:pPr>
             <a:r>
-              <a:rPr sz="1100" b="0">
+              <a:rPr sz="1200" b="0">
                 <a:solidFill>
                   <a:srgbClr val="8A8A8A"/>
                 </a:solidFill>
@@ -9294,7 +9294,7 @@
               </a:spcAft>
             </a:pPr>
             <a:r>
-              <a:rPr sz="1100" b="0">
+              <a:rPr sz="1200" b="0">
                 <a:solidFill>
                   <a:srgbClr val="8A8A8A"/>
                 </a:solidFill>
@@ -9748,7 +9748,7 @@
               </a:spcAft>
             </a:pPr>
             <a:r>
-              <a:rPr sz="1100" b="0">
+              <a:rPr sz="1200" b="0">
                 <a:solidFill>
                   <a:srgbClr val="8A8A8A"/>
                 </a:solidFill>
@@ -9792,7 +9792,7 @@
               </a:spcAft>
             </a:pPr>
             <a:r>
-              <a:rPr sz="1100" b="0">
+              <a:rPr sz="1200" b="0">
                 <a:solidFill>
                   <a:srgbClr val="8A8A8A"/>
                 </a:solidFill>
@@ -10121,7 +10121,7 @@
               </a:spcAft>
             </a:pPr>
             <a:r>
-              <a:rPr sz="1100" b="0">
+              <a:rPr sz="1200" b="0">
                 <a:solidFill>
                   <a:srgbClr val="8A8A8A"/>
                 </a:solidFill>
@@ -10165,7 +10165,7 @@
               </a:spcAft>
             </a:pPr>
             <a:r>
-              <a:rPr sz="1100" b="0">
+              <a:rPr sz="1200" b="0">
                 <a:solidFill>
                   <a:srgbClr val="8A8A8A"/>
                 </a:solidFill>
@@ -10578,7 +10578,7 @@
               </a:spcAft>
             </a:pPr>
             <a:r>
-              <a:rPr sz="1100" b="0">
+              <a:rPr sz="1200" b="0">
                 <a:solidFill>
                   <a:srgbClr val="8A8A8A"/>
                 </a:solidFill>
@@ -10622,7 +10622,7 @@
               </a:spcAft>
             </a:pPr>
             <a:r>
-              <a:rPr sz="1100" b="0">
+              <a:rPr sz="1200" b="0">
                 <a:solidFill>
                   <a:srgbClr val="8A8A8A"/>
                 </a:solidFill>
@@ -10951,7 +10951,7 @@
               </a:spcAft>
             </a:pPr>
             <a:r>
-              <a:rPr sz="1100" b="0">
+              <a:rPr sz="1200" b="0">
                 <a:solidFill>
                   <a:srgbClr val="8A8A8A"/>
                 </a:solidFill>
@@ -10995,7 +10995,7 @@
               </a:spcAft>
             </a:pPr>
             <a:r>
-              <a:rPr sz="1100" b="0">
+              <a:rPr sz="1200" b="0">
                 <a:solidFill>
                   <a:srgbClr val="8A8A8A"/>
                 </a:solidFill>
